--- a/Data_7.1.24.pptx
+++ b/Data_7.1.24.pptx
@@ -6,11 +6,13 @@
   </p:sldMasterIdLst>
   <p:sldIdLst>
     <p:sldId id="256" r:id="rId2"/>
-    <p:sldId id="257" r:id="rId3"/>
-    <p:sldId id="260" r:id="rId4"/>
-    <p:sldId id="261" r:id="rId5"/>
-    <p:sldId id="258" r:id="rId6"/>
-    <p:sldId id="259" r:id="rId7"/>
+    <p:sldId id="262" r:id="rId3"/>
+    <p:sldId id="263" r:id="rId4"/>
+    <p:sldId id="257" r:id="rId5"/>
+    <p:sldId id="260" r:id="rId6"/>
+    <p:sldId id="261" r:id="rId7"/>
+    <p:sldId id="258" r:id="rId8"/>
+    <p:sldId id="259" r:id="rId9"/>
   </p:sldIdLst>
   <p:sldSz cx="20116800" cy="9144000"/>
   <p:notesSz cx="6858000" cy="9144000"/>
@@ -109,6 +111,11 @@
       </a:defRPr>
     </a:lvl9pPr>
   </p:defaultTextStyle>
+  <p:extLst>
+    <p:ext uri="{EFAFB233-063F-42B5-8137-9DF3F51BA10A}">
+      <p15:sldGuideLst xmlns:p15="http://schemas.microsoft.com/office/powerpoint/2012/main"/>
+    </p:ext>
+  </p:extLst>
 </p:presentation>
 </file>
 
@@ -243,7 +250,7 @@
           <a:p>
             <a:fld id="{7327AAEE-DC88-4AA4-BDE4-B0D117FCF281}" type="datetimeFigureOut">
               <a:rPr lang="en-US" smtClean="0"/>
-              <a:t>7/1/2024</a:t>
+              <a:t>7/2/2024</a:t>
             </a:fld>
             <a:endParaRPr lang="en-US"/>
           </a:p>
@@ -413,7 +420,7 @@
           <a:p>
             <a:fld id="{7327AAEE-DC88-4AA4-BDE4-B0D117FCF281}" type="datetimeFigureOut">
               <a:rPr lang="en-US" smtClean="0"/>
-              <a:t>7/1/2024</a:t>
+              <a:t>7/2/2024</a:t>
             </a:fld>
             <a:endParaRPr lang="en-US"/>
           </a:p>
@@ -593,7 +600,7 @@
           <a:p>
             <a:fld id="{7327AAEE-DC88-4AA4-BDE4-B0D117FCF281}" type="datetimeFigureOut">
               <a:rPr lang="en-US" smtClean="0"/>
-              <a:t>7/1/2024</a:t>
+              <a:t>7/2/2024</a:t>
             </a:fld>
             <a:endParaRPr lang="en-US"/>
           </a:p>
@@ -763,7 +770,7 @@
           <a:p>
             <a:fld id="{7327AAEE-DC88-4AA4-BDE4-B0D117FCF281}" type="datetimeFigureOut">
               <a:rPr lang="en-US" smtClean="0"/>
-              <a:t>7/1/2024</a:t>
+              <a:t>7/2/2024</a:t>
             </a:fld>
             <a:endParaRPr lang="en-US"/>
           </a:p>
@@ -1009,7 +1016,7 @@
           <a:p>
             <a:fld id="{7327AAEE-DC88-4AA4-BDE4-B0D117FCF281}" type="datetimeFigureOut">
               <a:rPr lang="en-US" smtClean="0"/>
-              <a:t>7/1/2024</a:t>
+              <a:t>7/2/2024</a:t>
             </a:fld>
             <a:endParaRPr lang="en-US"/>
           </a:p>
@@ -1241,7 +1248,7 @@
           <a:p>
             <a:fld id="{7327AAEE-DC88-4AA4-BDE4-B0D117FCF281}" type="datetimeFigureOut">
               <a:rPr lang="en-US" smtClean="0"/>
-              <a:t>7/1/2024</a:t>
+              <a:t>7/2/2024</a:t>
             </a:fld>
             <a:endParaRPr lang="en-US"/>
           </a:p>
@@ -1608,7 +1615,7 @@
           <a:p>
             <a:fld id="{7327AAEE-DC88-4AA4-BDE4-B0D117FCF281}" type="datetimeFigureOut">
               <a:rPr lang="en-US" smtClean="0"/>
-              <a:t>7/1/2024</a:t>
+              <a:t>7/2/2024</a:t>
             </a:fld>
             <a:endParaRPr lang="en-US"/>
           </a:p>
@@ -1726,7 +1733,7 @@
           <a:p>
             <a:fld id="{7327AAEE-DC88-4AA4-BDE4-B0D117FCF281}" type="datetimeFigureOut">
               <a:rPr lang="en-US" smtClean="0"/>
-              <a:t>7/1/2024</a:t>
+              <a:t>7/2/2024</a:t>
             </a:fld>
             <a:endParaRPr lang="en-US"/>
           </a:p>
@@ -1821,7 +1828,7 @@
           <a:p>
             <a:fld id="{7327AAEE-DC88-4AA4-BDE4-B0D117FCF281}" type="datetimeFigureOut">
               <a:rPr lang="en-US" smtClean="0"/>
-              <a:t>7/1/2024</a:t>
+              <a:t>7/2/2024</a:t>
             </a:fld>
             <a:endParaRPr lang="en-US"/>
           </a:p>
@@ -2098,7 +2105,7 @@
           <a:p>
             <a:fld id="{7327AAEE-DC88-4AA4-BDE4-B0D117FCF281}" type="datetimeFigureOut">
               <a:rPr lang="en-US" smtClean="0"/>
-              <a:t>7/1/2024</a:t>
+              <a:t>7/2/2024</a:t>
             </a:fld>
             <a:endParaRPr lang="en-US"/>
           </a:p>
@@ -2355,7 +2362,7 @@
           <a:p>
             <a:fld id="{7327AAEE-DC88-4AA4-BDE4-B0D117FCF281}" type="datetimeFigureOut">
               <a:rPr lang="en-US" smtClean="0"/>
-              <a:t>7/1/2024</a:t>
+              <a:t>7/2/2024</a:t>
             </a:fld>
             <a:endParaRPr lang="en-US"/>
           </a:p>
@@ -2568,7 +2575,7 @@
           <a:p>
             <a:fld id="{7327AAEE-DC88-4AA4-BDE4-B0D117FCF281}" type="datetimeFigureOut">
               <a:rPr lang="en-US" smtClean="0"/>
-              <a:t>7/1/2024</a:t>
+              <a:t>7/2/2024</a:t>
             </a:fld>
             <a:endParaRPr lang="en-US"/>
           </a:p>
@@ -3202,7 +3209,7 @@
       </p:grpSpPr>
       <p:pic>
         <p:nvPicPr>
-          <p:cNvPr id="11" name="Picture 10"/>
+          <p:cNvPr id="4" name="Picture 3"/>
           <p:cNvPicPr>
             <a:picLocks noChangeAspect="1"/>
           </p:cNvPicPr>
@@ -3216,8 +3223,8 @@
         </p:blipFill>
         <p:spPr>
           <a:xfrm>
-            <a:off x="3199693" y="540519"/>
-            <a:ext cx="4500068" cy="3520779"/>
+            <a:off x="639762" y="446087"/>
+            <a:ext cx="5514975" cy="4314825"/>
           </a:xfrm>
           <a:prstGeom prst="rect">
             <a:avLst/>
@@ -3226,7 +3233,7 @@
       </p:pic>
       <p:pic>
         <p:nvPicPr>
-          <p:cNvPr id="12" name="Picture 11"/>
+          <p:cNvPr id="5" name="Picture 4"/>
           <p:cNvPicPr>
             <a:picLocks noChangeAspect="1"/>
           </p:cNvPicPr>
@@ -3240,8 +3247,8 @@
         </p:blipFill>
         <p:spPr>
           <a:xfrm>
-            <a:off x="7974631" y="540519"/>
-            <a:ext cx="4457449" cy="3439905"/>
+            <a:off x="6589712" y="446087"/>
+            <a:ext cx="5514975" cy="4314825"/>
           </a:xfrm>
           <a:prstGeom prst="rect">
             <a:avLst/>
@@ -3250,7 +3257,7 @@
       </p:pic>
       <p:pic>
         <p:nvPicPr>
-          <p:cNvPr id="13" name="Picture 12"/>
+          <p:cNvPr id="6" name="Picture 5"/>
           <p:cNvPicPr>
             <a:picLocks noChangeAspect="1"/>
           </p:cNvPicPr>
@@ -3264,8 +3271,8 @@
         </p:blipFill>
         <p:spPr>
           <a:xfrm>
-            <a:off x="12706946" y="540519"/>
-            <a:ext cx="4247910" cy="3323495"/>
+            <a:off x="13276262" y="560387"/>
+            <a:ext cx="5514975" cy="4314825"/>
           </a:xfrm>
           <a:prstGeom prst="rect">
             <a:avLst/>
@@ -3274,7 +3281,7 @@
       </p:pic>
       <p:pic>
         <p:nvPicPr>
-          <p:cNvPr id="14" name="Picture 13"/>
+          <p:cNvPr id="7" name="Picture 6"/>
           <p:cNvPicPr>
             <a:picLocks noChangeAspect="1"/>
           </p:cNvPicPr>
@@ -3288,8 +3295,8 @@
         </p:blipFill>
         <p:spPr>
           <a:xfrm>
-            <a:off x="3058282" y="4311754"/>
-            <a:ext cx="4718392" cy="3641280"/>
+            <a:off x="684212" y="4960937"/>
+            <a:ext cx="5591175" cy="4314825"/>
           </a:xfrm>
           <a:prstGeom prst="rect">
             <a:avLst/>
@@ -3298,7 +3305,7 @@
       </p:pic>
       <p:pic>
         <p:nvPicPr>
-          <p:cNvPr id="15" name="Picture 14"/>
+          <p:cNvPr id="8" name="Picture 7"/>
           <p:cNvPicPr>
             <a:picLocks noChangeAspect="1"/>
           </p:cNvPicPr>
@@ -3312,8 +3319,8 @@
         </p:blipFill>
         <p:spPr>
           <a:xfrm>
-            <a:off x="8399269" y="4388666"/>
-            <a:ext cx="3957950" cy="3008308"/>
+            <a:off x="6818312" y="4960936"/>
+            <a:ext cx="5514975" cy="4314825"/>
           </a:xfrm>
           <a:prstGeom prst="rect">
             <a:avLst/>
@@ -3322,7 +3329,7 @@
       </p:pic>
       <p:pic>
         <p:nvPicPr>
-          <p:cNvPr id="16" name="Picture 15"/>
+          <p:cNvPr id="9" name="Picture 8"/>
           <p:cNvPicPr>
             <a:picLocks noChangeAspect="1"/>
           </p:cNvPicPr>
@@ -3336,8 +3343,8 @@
         </p:blipFill>
         <p:spPr>
           <a:xfrm>
-            <a:off x="12753718" y="4289814"/>
-            <a:ext cx="4154369" cy="3206012"/>
+            <a:off x="13549312" y="4960936"/>
+            <a:ext cx="5591175" cy="4314825"/>
           </a:xfrm>
           <a:prstGeom prst="rect">
             <a:avLst/>
@@ -3347,7 +3354,7 @@
     </p:spTree>
     <p:extLst>
       <p:ext uri="{BB962C8B-B14F-4D97-AF65-F5344CB8AC3E}">
-        <p14:creationId xmlns:p14="http://schemas.microsoft.com/office/powerpoint/2010/main" val="2340622301"/>
+        <p14:creationId xmlns:p14="http://schemas.microsoft.com/office/powerpoint/2010/main" val="1595392142"/>
       </p:ext>
     </p:extLst>
   </p:cSld>
@@ -3390,8 +3397,8 @@
         </p:blipFill>
         <p:spPr>
           <a:xfrm>
-            <a:off x="366712" y="528637"/>
-            <a:ext cx="5381625" cy="4314825"/>
+            <a:off x="671512" y="414337"/>
+            <a:ext cx="5514975" cy="4314825"/>
           </a:xfrm>
           <a:prstGeom prst="rect">
             <a:avLst/>
@@ -3414,7 +3421,7 @@
         </p:blipFill>
         <p:spPr>
           <a:xfrm>
-            <a:off x="6929437" y="528637"/>
+            <a:off x="6964362" y="700087"/>
             <a:ext cx="5514975" cy="4314825"/>
           </a:xfrm>
           <a:prstGeom prst="rect">
@@ -3438,79 +3445,7 @@
         </p:blipFill>
         <p:spPr>
           <a:xfrm>
-            <a:off x="13482637" y="528637"/>
-            <a:ext cx="5381625" cy="4314825"/>
-          </a:xfrm>
-          <a:prstGeom prst="rect">
-            <a:avLst/>
-          </a:prstGeom>
-        </p:spPr>
-      </p:pic>
-      <p:pic>
-        <p:nvPicPr>
-          <p:cNvPr id="7" name="Picture 6"/>
-          <p:cNvPicPr>
-            <a:picLocks noChangeAspect="1"/>
-          </p:cNvPicPr>
-          <p:nvPr/>
-        </p:nvPicPr>
-        <p:blipFill>
-          <a:blip r:embed="rId5"/>
-          <a:stretch>
-            <a:fillRect/>
-          </a:stretch>
-        </p:blipFill>
-        <p:spPr>
-          <a:xfrm>
-            <a:off x="376237" y="4843462"/>
-            <a:ext cx="5514975" cy="4314825"/>
-          </a:xfrm>
-          <a:prstGeom prst="rect">
-            <a:avLst/>
-          </a:prstGeom>
-        </p:spPr>
-      </p:pic>
-      <p:pic>
-        <p:nvPicPr>
-          <p:cNvPr id="8" name="Picture 7"/>
-          <p:cNvPicPr>
-            <a:picLocks noChangeAspect="1"/>
-          </p:cNvPicPr>
-          <p:nvPr/>
-        </p:nvPicPr>
-        <p:blipFill>
-          <a:blip r:embed="rId6"/>
-          <a:stretch>
-            <a:fillRect/>
-          </a:stretch>
-        </p:blipFill>
-        <p:spPr>
-          <a:xfrm>
-            <a:off x="7072312" y="4843462"/>
-            <a:ext cx="5514975" cy="4314825"/>
-          </a:xfrm>
-          <a:prstGeom prst="rect">
-            <a:avLst/>
-          </a:prstGeom>
-        </p:spPr>
-      </p:pic>
-      <p:pic>
-        <p:nvPicPr>
-          <p:cNvPr id="9" name="Picture 8"/>
-          <p:cNvPicPr>
-            <a:picLocks noChangeAspect="1"/>
-          </p:cNvPicPr>
-          <p:nvPr/>
-        </p:nvPicPr>
-        <p:blipFill>
-          <a:blip r:embed="rId7"/>
-          <a:stretch>
-            <a:fillRect/>
-          </a:stretch>
-        </p:blipFill>
-        <p:spPr>
-          <a:xfrm>
-            <a:off x="13558837" y="4843462"/>
+            <a:off x="13555662" y="649287"/>
             <a:ext cx="5514975" cy="4314825"/>
           </a:xfrm>
           <a:prstGeom prst="rect">
@@ -3521,7 +3456,7 @@
     </p:spTree>
     <p:extLst>
       <p:ext uri="{BB962C8B-B14F-4D97-AF65-F5344CB8AC3E}">
-        <p14:creationId xmlns:p14="http://schemas.microsoft.com/office/powerpoint/2010/main" val="51079216"/>
+        <p14:creationId xmlns:p14="http://schemas.microsoft.com/office/powerpoint/2010/main" val="2509234874"/>
       </p:ext>
     </p:extLst>
   </p:cSld>
@@ -3550,7 +3485,7 @@
       </p:grpSpPr>
       <p:pic>
         <p:nvPicPr>
-          <p:cNvPr id="4" name="Picture 3"/>
+          <p:cNvPr id="11" name="Picture 10"/>
           <p:cNvPicPr>
             <a:picLocks noChangeAspect="1"/>
           </p:cNvPicPr>
@@ -3564,8 +3499,8 @@
         </p:blipFill>
         <p:spPr>
           <a:xfrm>
-            <a:off x="185737" y="328612"/>
-            <a:ext cx="5514975" cy="4314825"/>
+            <a:off x="3199693" y="540519"/>
+            <a:ext cx="4500068" cy="3520779"/>
           </a:xfrm>
           <a:prstGeom prst="rect">
             <a:avLst/>
@@ -3574,7 +3509,7 @@
       </p:pic>
       <p:pic>
         <p:nvPicPr>
-          <p:cNvPr id="5" name="Picture 4"/>
+          <p:cNvPr id="12" name="Picture 11"/>
           <p:cNvPicPr>
             <a:picLocks noChangeAspect="1"/>
           </p:cNvPicPr>
@@ -3588,8 +3523,8 @@
         </p:blipFill>
         <p:spPr>
           <a:xfrm>
-            <a:off x="6319837" y="328612"/>
-            <a:ext cx="5591175" cy="4314825"/>
+            <a:off x="7974631" y="540519"/>
+            <a:ext cx="4457449" cy="3439905"/>
           </a:xfrm>
           <a:prstGeom prst="rect">
             <a:avLst/>
@@ -3598,7 +3533,7 @@
       </p:pic>
       <p:pic>
         <p:nvPicPr>
-          <p:cNvPr id="6" name="Picture 5"/>
+          <p:cNvPr id="13" name="Picture 12"/>
           <p:cNvPicPr>
             <a:picLocks noChangeAspect="1"/>
           </p:cNvPicPr>
@@ -3612,8 +3547,8 @@
         </p:blipFill>
         <p:spPr>
           <a:xfrm>
-            <a:off x="13330237" y="471487"/>
-            <a:ext cx="5514975" cy="4314825"/>
+            <a:off x="12706946" y="540519"/>
+            <a:ext cx="4247910" cy="3323495"/>
           </a:xfrm>
           <a:prstGeom prst="rect">
             <a:avLst/>
@@ -3622,7 +3557,7 @@
       </p:pic>
       <p:pic>
         <p:nvPicPr>
-          <p:cNvPr id="7" name="Picture 6"/>
+          <p:cNvPr id="14" name="Picture 13"/>
           <p:cNvPicPr>
             <a:picLocks noChangeAspect="1"/>
           </p:cNvPicPr>
@@ -3636,8 +3571,8 @@
         </p:blipFill>
         <p:spPr>
           <a:xfrm>
-            <a:off x="147636" y="4786312"/>
-            <a:ext cx="5591175" cy="4314825"/>
+            <a:off x="3058282" y="4311754"/>
+            <a:ext cx="4718392" cy="3641280"/>
           </a:xfrm>
           <a:prstGeom prst="rect">
             <a:avLst/>
@@ -3646,7 +3581,7 @@
       </p:pic>
       <p:pic>
         <p:nvPicPr>
-          <p:cNvPr id="8" name="Picture 7"/>
+          <p:cNvPr id="15" name="Picture 14"/>
           <p:cNvPicPr>
             <a:picLocks noChangeAspect="1"/>
           </p:cNvPicPr>
@@ -3660,8 +3595,8 @@
         </p:blipFill>
         <p:spPr>
           <a:xfrm>
-            <a:off x="6391275" y="4786311"/>
-            <a:ext cx="5676900" cy="4314825"/>
+            <a:off x="8399269" y="4388666"/>
+            <a:ext cx="3957950" cy="3008308"/>
           </a:xfrm>
           <a:prstGeom prst="rect">
             <a:avLst/>
@@ -3670,7 +3605,7 @@
       </p:pic>
       <p:pic>
         <p:nvPicPr>
-          <p:cNvPr id="9" name="Picture 8"/>
+          <p:cNvPr id="16" name="Picture 15"/>
           <p:cNvPicPr>
             <a:picLocks noChangeAspect="1"/>
           </p:cNvPicPr>
@@ -3684,8 +3619,8 @@
         </p:blipFill>
         <p:spPr>
           <a:xfrm>
-            <a:off x="13254037" y="4786310"/>
-            <a:ext cx="5591175" cy="4314825"/>
+            <a:off x="12753718" y="4289814"/>
+            <a:ext cx="4154369" cy="3206012"/>
           </a:xfrm>
           <a:prstGeom prst="rect">
             <a:avLst/>
@@ -3695,7 +3630,7 @@
     </p:spTree>
     <p:extLst>
       <p:ext uri="{BB962C8B-B14F-4D97-AF65-F5344CB8AC3E}">
-        <p14:creationId xmlns:p14="http://schemas.microsoft.com/office/powerpoint/2010/main" val="3884165348"/>
+        <p14:creationId xmlns:p14="http://schemas.microsoft.com/office/powerpoint/2010/main" val="2340622301"/>
       </p:ext>
     </p:extLst>
   </p:cSld>
@@ -3738,8 +3673,8 @@
         </p:blipFill>
         <p:spPr>
           <a:xfrm>
-            <a:off x="1414885" y="492677"/>
-            <a:ext cx="4750349" cy="3808687"/>
+            <a:off x="366712" y="528637"/>
+            <a:ext cx="5381625" cy="4314825"/>
           </a:xfrm>
           <a:prstGeom prst="rect">
             <a:avLst/>
@@ -3762,8 +3697,8 @@
         </p:blipFill>
         <p:spPr>
           <a:xfrm>
-            <a:off x="6869751" y="492677"/>
-            <a:ext cx="4751462" cy="3809579"/>
+            <a:off x="6929437" y="528637"/>
+            <a:ext cx="5514975" cy="4314825"/>
           </a:xfrm>
           <a:prstGeom prst="rect">
             <a:avLst/>
@@ -3786,8 +3721,8 @@
         </p:blipFill>
         <p:spPr>
           <a:xfrm>
-            <a:off x="12627793" y="337941"/>
-            <a:ext cx="5136332" cy="4118157"/>
+            <a:off x="13482637" y="528637"/>
+            <a:ext cx="5381625" cy="4314825"/>
           </a:xfrm>
           <a:prstGeom prst="rect">
             <a:avLst/>
@@ -3810,7 +3745,7 @@
         </p:blipFill>
         <p:spPr>
           <a:xfrm>
-            <a:off x="1032573" y="4568128"/>
+            <a:off x="376237" y="4843462"/>
             <a:ext cx="5514975" cy="4314825"/>
           </a:xfrm>
           <a:prstGeom prst="rect">
@@ -3834,7 +3769,7 @@
         </p:blipFill>
         <p:spPr>
           <a:xfrm>
-            <a:off x="6784027" y="4568127"/>
+            <a:off x="7072312" y="4843462"/>
             <a:ext cx="5514975" cy="4314825"/>
           </a:xfrm>
           <a:prstGeom prst="rect">
@@ -3858,6 +3793,354 @@
         </p:blipFill>
         <p:spPr>
           <a:xfrm>
+            <a:off x="13558837" y="4843462"/>
+            <a:ext cx="5514975" cy="4314825"/>
+          </a:xfrm>
+          <a:prstGeom prst="rect">
+            <a:avLst/>
+          </a:prstGeom>
+        </p:spPr>
+      </p:pic>
+    </p:spTree>
+    <p:extLst>
+      <p:ext uri="{BB962C8B-B14F-4D97-AF65-F5344CB8AC3E}">
+        <p14:creationId xmlns:p14="http://schemas.microsoft.com/office/powerpoint/2010/main" val="51079216"/>
+      </p:ext>
+    </p:extLst>
+  </p:cSld>
+  <p:clrMapOvr>
+    <a:masterClrMapping/>
+  </p:clrMapOvr>
+</p:sld>
+</file>
+
+<file path=ppt/slides/slide6.xml><?xml version="1.0" encoding="utf-8"?>
+<p:sld xmlns:a="http://schemas.openxmlformats.org/drawingml/2006/main" xmlns:r="http://schemas.openxmlformats.org/officeDocument/2006/relationships" xmlns:p="http://schemas.openxmlformats.org/presentationml/2006/main">
+  <p:cSld>
+    <p:spTree>
+      <p:nvGrpSpPr>
+        <p:cNvPr id="1" name=""/>
+        <p:cNvGrpSpPr/>
+        <p:nvPr/>
+      </p:nvGrpSpPr>
+      <p:grpSpPr>
+        <a:xfrm>
+          <a:off x="0" y="0"/>
+          <a:ext cx="0" cy="0"/>
+          <a:chOff x="0" y="0"/>
+          <a:chExt cx="0" cy="0"/>
+        </a:xfrm>
+      </p:grpSpPr>
+      <p:pic>
+        <p:nvPicPr>
+          <p:cNvPr id="4" name="Picture 3"/>
+          <p:cNvPicPr>
+            <a:picLocks noChangeAspect="1"/>
+          </p:cNvPicPr>
+          <p:nvPr/>
+        </p:nvPicPr>
+        <p:blipFill>
+          <a:blip r:embed="rId2"/>
+          <a:stretch>
+            <a:fillRect/>
+          </a:stretch>
+        </p:blipFill>
+        <p:spPr>
+          <a:xfrm>
+            <a:off x="185737" y="328612"/>
+            <a:ext cx="5514975" cy="4314825"/>
+          </a:xfrm>
+          <a:prstGeom prst="rect">
+            <a:avLst/>
+          </a:prstGeom>
+        </p:spPr>
+      </p:pic>
+      <p:pic>
+        <p:nvPicPr>
+          <p:cNvPr id="5" name="Picture 4"/>
+          <p:cNvPicPr>
+            <a:picLocks noChangeAspect="1"/>
+          </p:cNvPicPr>
+          <p:nvPr/>
+        </p:nvPicPr>
+        <p:blipFill>
+          <a:blip r:embed="rId3"/>
+          <a:stretch>
+            <a:fillRect/>
+          </a:stretch>
+        </p:blipFill>
+        <p:spPr>
+          <a:xfrm>
+            <a:off x="6319837" y="328612"/>
+            <a:ext cx="5591175" cy="4314825"/>
+          </a:xfrm>
+          <a:prstGeom prst="rect">
+            <a:avLst/>
+          </a:prstGeom>
+        </p:spPr>
+      </p:pic>
+      <p:pic>
+        <p:nvPicPr>
+          <p:cNvPr id="6" name="Picture 5"/>
+          <p:cNvPicPr>
+            <a:picLocks noChangeAspect="1"/>
+          </p:cNvPicPr>
+          <p:nvPr/>
+        </p:nvPicPr>
+        <p:blipFill>
+          <a:blip r:embed="rId4"/>
+          <a:stretch>
+            <a:fillRect/>
+          </a:stretch>
+        </p:blipFill>
+        <p:spPr>
+          <a:xfrm>
+            <a:off x="13330237" y="471487"/>
+            <a:ext cx="5514975" cy="4314825"/>
+          </a:xfrm>
+          <a:prstGeom prst="rect">
+            <a:avLst/>
+          </a:prstGeom>
+        </p:spPr>
+      </p:pic>
+      <p:pic>
+        <p:nvPicPr>
+          <p:cNvPr id="7" name="Picture 6"/>
+          <p:cNvPicPr>
+            <a:picLocks noChangeAspect="1"/>
+          </p:cNvPicPr>
+          <p:nvPr/>
+        </p:nvPicPr>
+        <p:blipFill>
+          <a:blip r:embed="rId5"/>
+          <a:stretch>
+            <a:fillRect/>
+          </a:stretch>
+        </p:blipFill>
+        <p:spPr>
+          <a:xfrm>
+            <a:off x="147636" y="4786312"/>
+            <a:ext cx="5591175" cy="4314825"/>
+          </a:xfrm>
+          <a:prstGeom prst="rect">
+            <a:avLst/>
+          </a:prstGeom>
+        </p:spPr>
+      </p:pic>
+      <p:pic>
+        <p:nvPicPr>
+          <p:cNvPr id="8" name="Picture 7"/>
+          <p:cNvPicPr>
+            <a:picLocks noChangeAspect="1"/>
+          </p:cNvPicPr>
+          <p:nvPr/>
+        </p:nvPicPr>
+        <p:blipFill>
+          <a:blip r:embed="rId6"/>
+          <a:stretch>
+            <a:fillRect/>
+          </a:stretch>
+        </p:blipFill>
+        <p:spPr>
+          <a:xfrm>
+            <a:off x="6391275" y="4786311"/>
+            <a:ext cx="5676900" cy="4314825"/>
+          </a:xfrm>
+          <a:prstGeom prst="rect">
+            <a:avLst/>
+          </a:prstGeom>
+        </p:spPr>
+      </p:pic>
+      <p:pic>
+        <p:nvPicPr>
+          <p:cNvPr id="9" name="Picture 8"/>
+          <p:cNvPicPr>
+            <a:picLocks noChangeAspect="1"/>
+          </p:cNvPicPr>
+          <p:nvPr/>
+        </p:nvPicPr>
+        <p:blipFill>
+          <a:blip r:embed="rId7"/>
+          <a:stretch>
+            <a:fillRect/>
+          </a:stretch>
+        </p:blipFill>
+        <p:spPr>
+          <a:xfrm>
+            <a:off x="13254037" y="4786310"/>
+            <a:ext cx="5591175" cy="4314825"/>
+          </a:xfrm>
+          <a:prstGeom prst="rect">
+            <a:avLst/>
+          </a:prstGeom>
+        </p:spPr>
+      </p:pic>
+    </p:spTree>
+    <p:extLst>
+      <p:ext uri="{BB962C8B-B14F-4D97-AF65-F5344CB8AC3E}">
+        <p14:creationId xmlns:p14="http://schemas.microsoft.com/office/powerpoint/2010/main" val="3884165348"/>
+      </p:ext>
+    </p:extLst>
+  </p:cSld>
+  <p:clrMapOvr>
+    <a:masterClrMapping/>
+  </p:clrMapOvr>
+</p:sld>
+</file>
+
+<file path=ppt/slides/slide7.xml><?xml version="1.0" encoding="utf-8"?>
+<p:sld xmlns:a="http://schemas.openxmlformats.org/drawingml/2006/main" xmlns:r="http://schemas.openxmlformats.org/officeDocument/2006/relationships" xmlns:p="http://schemas.openxmlformats.org/presentationml/2006/main">
+  <p:cSld>
+    <p:spTree>
+      <p:nvGrpSpPr>
+        <p:cNvPr id="1" name=""/>
+        <p:cNvGrpSpPr/>
+        <p:nvPr/>
+      </p:nvGrpSpPr>
+      <p:grpSpPr>
+        <a:xfrm>
+          <a:off x="0" y="0"/>
+          <a:ext cx="0" cy="0"/>
+          <a:chOff x="0" y="0"/>
+          <a:chExt cx="0" cy="0"/>
+        </a:xfrm>
+      </p:grpSpPr>
+      <p:pic>
+        <p:nvPicPr>
+          <p:cNvPr id="4" name="Picture 3"/>
+          <p:cNvPicPr>
+            <a:picLocks noChangeAspect="1"/>
+          </p:cNvPicPr>
+          <p:nvPr/>
+        </p:nvPicPr>
+        <p:blipFill>
+          <a:blip r:embed="rId2"/>
+          <a:stretch>
+            <a:fillRect/>
+          </a:stretch>
+        </p:blipFill>
+        <p:spPr>
+          <a:xfrm>
+            <a:off x="1414885" y="492677"/>
+            <a:ext cx="4750349" cy="3808687"/>
+          </a:xfrm>
+          <a:prstGeom prst="rect">
+            <a:avLst/>
+          </a:prstGeom>
+        </p:spPr>
+      </p:pic>
+      <p:pic>
+        <p:nvPicPr>
+          <p:cNvPr id="5" name="Picture 4"/>
+          <p:cNvPicPr>
+            <a:picLocks noChangeAspect="1"/>
+          </p:cNvPicPr>
+          <p:nvPr/>
+        </p:nvPicPr>
+        <p:blipFill>
+          <a:blip r:embed="rId3"/>
+          <a:stretch>
+            <a:fillRect/>
+          </a:stretch>
+        </p:blipFill>
+        <p:spPr>
+          <a:xfrm>
+            <a:off x="6869751" y="492677"/>
+            <a:ext cx="4751462" cy="3809579"/>
+          </a:xfrm>
+          <a:prstGeom prst="rect">
+            <a:avLst/>
+          </a:prstGeom>
+        </p:spPr>
+      </p:pic>
+      <p:pic>
+        <p:nvPicPr>
+          <p:cNvPr id="6" name="Picture 5"/>
+          <p:cNvPicPr>
+            <a:picLocks noChangeAspect="1"/>
+          </p:cNvPicPr>
+          <p:nvPr/>
+        </p:nvPicPr>
+        <p:blipFill>
+          <a:blip r:embed="rId4"/>
+          <a:stretch>
+            <a:fillRect/>
+          </a:stretch>
+        </p:blipFill>
+        <p:spPr>
+          <a:xfrm>
+            <a:off x="12627793" y="337941"/>
+            <a:ext cx="5136332" cy="4118157"/>
+          </a:xfrm>
+          <a:prstGeom prst="rect">
+            <a:avLst/>
+          </a:prstGeom>
+        </p:spPr>
+      </p:pic>
+      <p:pic>
+        <p:nvPicPr>
+          <p:cNvPr id="7" name="Picture 6"/>
+          <p:cNvPicPr>
+            <a:picLocks noChangeAspect="1"/>
+          </p:cNvPicPr>
+          <p:nvPr/>
+        </p:nvPicPr>
+        <p:blipFill>
+          <a:blip r:embed="rId5"/>
+          <a:stretch>
+            <a:fillRect/>
+          </a:stretch>
+        </p:blipFill>
+        <p:spPr>
+          <a:xfrm>
+            <a:off x="1032573" y="4568128"/>
+            <a:ext cx="5514975" cy="4314825"/>
+          </a:xfrm>
+          <a:prstGeom prst="rect">
+            <a:avLst/>
+          </a:prstGeom>
+        </p:spPr>
+      </p:pic>
+      <p:pic>
+        <p:nvPicPr>
+          <p:cNvPr id="8" name="Picture 7"/>
+          <p:cNvPicPr>
+            <a:picLocks noChangeAspect="1"/>
+          </p:cNvPicPr>
+          <p:nvPr/>
+        </p:nvPicPr>
+        <p:blipFill>
+          <a:blip r:embed="rId6"/>
+          <a:stretch>
+            <a:fillRect/>
+          </a:stretch>
+        </p:blipFill>
+        <p:spPr>
+          <a:xfrm>
+            <a:off x="6784027" y="4568127"/>
+            <a:ext cx="5514975" cy="4314825"/>
+          </a:xfrm>
+          <a:prstGeom prst="rect">
+            <a:avLst/>
+          </a:prstGeom>
+        </p:spPr>
+      </p:pic>
+      <p:pic>
+        <p:nvPicPr>
+          <p:cNvPr id="9" name="Picture 8"/>
+          <p:cNvPicPr>
+            <a:picLocks noChangeAspect="1"/>
+          </p:cNvPicPr>
+          <p:nvPr/>
+        </p:nvPicPr>
+        <p:blipFill>
+          <a:blip r:embed="rId7"/>
+          <a:stretch>
+            <a:fillRect/>
+          </a:stretch>
+        </p:blipFill>
+        <p:spPr>
+          <a:xfrm>
             <a:off x="12627793" y="4568126"/>
             <a:ext cx="5514975" cy="4314825"/>
           </a:xfrm>
@@ -3879,7 +4162,7 @@
 </p:sld>
 </file>
 
-<file path=ppt/slides/slide6.xml><?xml version="1.0" encoding="utf-8"?>
+<file path=ppt/slides/slide8.xml><?xml version="1.0" encoding="utf-8"?>
 <p:sld xmlns:a="http://schemas.openxmlformats.org/drawingml/2006/main" xmlns:r="http://schemas.openxmlformats.org/officeDocument/2006/relationships" xmlns:p="http://schemas.openxmlformats.org/presentationml/2006/main">
   <p:cSld>
     <p:spTree>
